--- a/deck/namp-2026/out/2026_납품대금연동제_추가제안4종_1p.pptx
+++ b/deck/namp-2026/out/2026_납품대금연동제_추가제안4종_1p.pptx
@@ -4087,7 +4087,7 @@
       </p:sp>
       <p:pic>
         <p:nvPicPr>
-          <p:cNvPr id="93" name="Image 0" descr="/home/user/kstat-pm/deck/namp-2026/assets/s20-report.png">    </p:cNvPr>
+          <p:cNvPr id="93" name="Image 0" descr="s20-report">    </p:cNvPr>
           <p:cNvPicPr>
             <a:picLocks noChangeAspect="1"/>
           </p:cNvPicPr>
